--- a/static/ppts/G7_Math_Full_Revision.pptx
+++ b/static/ppts/G7_Math_Full_Revision.pptx
@@ -1603,38 +1603,55 @@
                 <a:ea typeface="Georgia" pitchFamily="34" charset="-122"/>
                 <a:cs typeface="Georgia" pitchFamily="34" charset="-120"/>
               </a:rPr>
-              <a:t>Algebra Revision</a:t>
+              <a:t>Algebra</a:t>
             </a:r>
             <a:endParaRPr lang="en-US" sz="4000" dirty="0"/>
           </a:p>
-        </p:txBody>
-      </p:sp>
-      <p:sp>
-        <p:nvSpPr>
-          <p:cNvPr id="6" name="Text 4"/>
-          <p:cNvSpPr/>
-          <p:nvPr/>
-        </p:nvSpPr>
-        <p:spPr>
-          <a:xfrm>
-            <a:off x="731520" y="3200400"/>
-            <a:ext cx="7680960" cy="548640"/>
-          </a:xfrm>
-          <a:prstGeom prst="rect">
-            <a:avLst/>
-          </a:prstGeom>
-          <a:noFill/>
-          <a:ln/>
-        </p:spPr>
-        <p:txBody>
-          <a:bodyPr wrap="square" rtlCol="0" anchor="ctr"/>
-          <a:lstStyle/>
           <a:p>
             <a:pPr indent="0" marL="0">
               <a:buNone/>
             </a:pPr>
             <a:r>
-              <a:rPr lang="en-US" sz="1600" dirty="0">
+              <a:rPr lang="en-US" sz="4000" b="1" dirty="0">
+                <a:solidFill>
+                  <a:srgbClr val="FFFFFF"/>
+                </a:solidFill>
+                <a:latin typeface="Georgia" pitchFamily="34" charset="0"/>
+                <a:ea typeface="Georgia" pitchFamily="34" charset="-122"/>
+                <a:cs typeface="Georgia" pitchFamily="34" charset="-120"/>
+              </a:rPr>
+              <a:t>Full Revision</a:t>
+            </a:r>
+            <a:endParaRPr lang="en-US" sz="4000" dirty="0"/>
+          </a:p>
+        </p:txBody>
+      </p:sp>
+      <p:sp>
+        <p:nvSpPr>
+          <p:cNvPr id="6" name="Text 4"/>
+          <p:cNvSpPr/>
+          <p:nvPr/>
+        </p:nvSpPr>
+        <p:spPr>
+          <a:xfrm>
+            <a:off x="731520" y="3200400"/>
+            <a:ext cx="7680960" cy="548640"/>
+          </a:xfrm>
+          <a:prstGeom prst="rect">
+            <a:avLst/>
+          </a:prstGeom>
+          <a:noFill/>
+          <a:ln/>
+        </p:spPr>
+        <p:txBody>
+          <a:bodyPr wrap="square" rtlCol="0" anchor="ctr"/>
+          <a:lstStyle/>
+          <a:p>
+            <a:pPr indent="0" marL="0">
+              <a:buNone/>
+            </a:pPr>
+            <a:r>
+              <a:rPr lang="en-US" sz="1600" i="1" dirty="0">
                 <a:solidFill>
                   <a:srgbClr val="9B9690"/>
                 </a:solidFill>
@@ -1642,7 +1659,7 @@
                 <a:ea typeface="Calibri" pitchFamily="34" charset="-122"/>
                 <a:cs typeface="Calibri" pitchFamily="34" charset="-120"/>
               </a:rPr>
-              <a:t>Expressions, equations, patterns, and substitution</a:t>
+              <a:t>Expressions, Equations, Functions &amp; Substitution</a:t>
             </a:r>
             <a:endParaRPr lang="en-US" sz="1600" dirty="0"/>
           </a:p>
@@ -1673,7 +1690,7 @@
               <a:buNone/>
             </a:pPr>
             <a:r>
-              <a:rPr lang="en-US" sz="1100" dirty="0">
+              <a:rPr lang="en-US" sz="1200" dirty="0">
                 <a:solidFill>
                   <a:srgbClr val="6B6660"/>
                 </a:solidFill>
@@ -1681,9 +1698,9 @@
                 <a:ea typeface="Calibri" pitchFamily="34" charset="-122"/>
                 <a:cs typeface="Calibri" pitchFamily="34" charset="-120"/>
               </a:rPr>
-              <a:t>Mr Zocchi · NIS</a:t>
-            </a:r>
-            <a:endParaRPr lang="en-US" sz="1100" dirty="0"/>
+              <a:t>Mr Zocchi</a:t>
+            </a:r>
+            <a:endParaRPr lang="en-US" sz="1200" dirty="0"/>
           </a:p>
         </p:txBody>
       </p:sp>
@@ -1741,7 +1758,7 @@
         <p:spPr>
           <a:xfrm>
             <a:off x="731520" y="914400"/>
-            <a:ext cx="2743200" cy="1371600"/>
+            <a:ext cx="1828800" cy="1097280"/>
           </a:xfrm>
           <a:prstGeom prst="rect">
             <a:avLst/>
@@ -1781,7 +1798,7 @@
         </p:nvSpPr>
         <p:spPr>
           <a:xfrm>
-            <a:off x="731520" y="2286000"/>
+            <a:off x="731520" y="2011680"/>
             <a:ext cx="7680960" cy="1097280"/>
           </a:xfrm>
           <a:prstGeom prst="rect">
@@ -1798,7 +1815,7 @@
               <a:buNone/>
             </a:pPr>
             <a:r>
-              <a:rPr lang="en-US" sz="3600" b="1" dirty="0">
+              <a:rPr lang="en-US" sz="3200" b="1" dirty="0">
                 <a:solidFill>
                   <a:srgbClr val="FFFFFF"/>
                 </a:solidFill>
@@ -1808,9 +1825,29 @@
               </a:rPr>
               <a:t>Expressions</a:t>
             </a:r>
-            <a:endParaRPr lang="en-US" sz="3600" dirty="0"/>
-          </a:p>
-        </p:txBody>
+            <a:endParaRPr lang="en-US" sz="3200" dirty="0"/>
+          </a:p>
+        </p:txBody>
+      </p:sp>
+      <p:sp>
+        <p:nvSpPr>
+          <p:cNvPr id="5" name="Shape 3"/>
+          <p:cNvSpPr/>
+          <p:nvPr/>
+        </p:nvSpPr>
+        <p:spPr>
+          <a:xfrm>
+            <a:off x="731520" y="3200400"/>
+            <a:ext cx="1828800" cy="54864"/>
+          </a:xfrm>
+          <a:prstGeom prst="rect">
+            <a:avLst/>
+          </a:prstGeom>
+          <a:solidFill>
+            <a:srgbClr val="C8372D"/>
+          </a:solidFill>
+          <a:ln/>
+        </p:spPr>
       </p:sp>
     </p:spTree>
   </p:cSld>
@@ -1823,6 +1860,13 @@
 <file path=ppt/slides/slide3.xml><?xml version="1.0" encoding="utf-8"?>
 <p:sld xmlns:a="http://schemas.openxmlformats.org/drawingml/2006/main" xmlns:r="http://schemas.openxmlformats.org/officeDocument/2006/relationships" xmlns:p="http://schemas.openxmlformats.org/presentationml/2006/main">
   <p:cSld name="Slide 3">
+    <p:bg>
+      <p:bgPr>
+        <a:solidFill>
+          <a:srgbClr val="FAF8F5"/>
+        </a:solidFill>
+      </p:bgPr>
+    </p:bg>
     <p:spTree>
       <p:nvGrpSpPr>
         <p:cNvPr id="1" name=""/>
@@ -1846,13 +1890,13 @@
         <p:spPr>
           <a:xfrm>
             <a:off x="0" y="0"/>
-            <a:ext cx="9144000" cy="5143500"/>
-          </a:xfrm>
-          <a:prstGeom prst="rect">
-            <a:avLst/>
-          </a:prstGeom>
-          <a:solidFill>
-            <a:srgbClr val="FAF8F5"/>
+            <a:ext cx="9144000" cy="822960"/>
+          </a:xfrm>
+          <a:prstGeom prst="rect">
+            <a:avLst/>
+          </a:prstGeom>
+          <a:solidFill>
+            <a:srgbClr val="FFFFFF"/>
           </a:solidFill>
           <a:ln/>
         </p:spPr>
@@ -1865,8 +1909,8 @@
         </p:nvSpPr>
         <p:spPr>
           <a:xfrm>
-            <a:off x="0" y="0"/>
-            <a:ext cx="9144000" cy="54864"/>
+            <a:off x="0" y="795528"/>
+            <a:ext cx="9144000" cy="27432"/>
           </a:xfrm>
           <a:prstGeom prst="rect">
             <a:avLst/>
@@ -1885,7 +1929,7 @@
         </p:nvSpPr>
         <p:spPr>
           <a:xfrm>
-            <a:off x="640080" y="320040"/>
+            <a:off x="640080" y="91440"/>
             <a:ext cx="7863840" cy="640080"/>
           </a:xfrm>
           <a:prstGeom prst="rect">
@@ -1902,7 +1946,7 @@
               <a:buNone/>
             </a:pPr>
             <a:r>
-              <a:rPr lang="en-US" sz="2600" b="1" dirty="0">
+              <a:rPr lang="en-US" sz="2200" b="1" dirty="0">
                 <a:solidFill>
                   <a:srgbClr val="1B2A4A"/>
                 </a:solidFill>
@@ -1910,9 +1954,9 @@
                 <a:ea typeface="Georgia" pitchFamily="34" charset="-122"/>
                 <a:cs typeface="Georgia" pitchFamily="34" charset="-120"/>
               </a:rPr>
-              <a:t>Expressions Quick Ref</a:t>
-            </a:r>
-            <a:endParaRPr lang="en-US" sz="2600" dirty="0"/>
+              <a:t>Expressions Recap</a:t>
+            </a:r>
+            <a:endParaRPr lang="en-US" sz="2200" dirty="0"/>
           </a:p>
         </p:txBody>
       </p:sp>
@@ -1924,8 +1968,8 @@
         </p:nvSpPr>
         <p:spPr>
           <a:xfrm>
-            <a:off x="640080" y="1188720"/>
-            <a:ext cx="7863840" cy="3200400"/>
+            <a:off x="640080" y="1005840"/>
+            <a:ext cx="7863840" cy="2926080"/>
           </a:xfrm>
           <a:prstGeom prst="rect">
             <a:avLst/>
@@ -1934,18 +1978,18 @@
           <a:ln/>
         </p:spPr>
         <p:txBody>
-          <a:bodyPr wrap="square" rtlCol="0" anchor="t"/>
+          <a:bodyPr wrap="square" rtlCol="0" anchor="ctr"/>
           <a:lstStyle/>
           <a:p>
             <a:pPr marL="342900" indent="-342900">
-              <a:lnSpc>
-                <a:spcPct val="140000"/>
-              </a:lnSpc>
+              <a:spcAft>
+                <a:spcPts val="800"/>
+              </a:spcAft>
               <a:buSzPct val="100000"/>
               <a:buChar char="•"/>
             </a:pPr>
             <a:r>
-              <a:rPr lang="en-US" sz="1500" dirty="0">
+              <a:rPr lang="en-US" sz="1600" dirty="0">
                 <a:solidFill>
                   <a:srgbClr val="3D3A36"/>
                 </a:solidFill>
@@ -1953,20 +1997,20 @@
                 <a:ea typeface="Calibri" pitchFamily="34" charset="-122"/>
                 <a:cs typeface="Calibri" pitchFamily="34" charset="-120"/>
               </a:rPr>
-              <a:t>Variable, term, coefficient, constant, like terms.</a:t>
-            </a:r>
-            <a:endParaRPr lang="en-US" sz="1500" dirty="0"/>
+              <a:t>Numbers + variables + operations. NO equals sign.</a:t>
+            </a:r>
+            <a:endParaRPr lang="en-US" sz="1600" dirty="0"/>
           </a:p>
           <a:p>
             <a:pPr marL="342900" indent="-342900">
-              <a:lnSpc>
-                <a:spcPct val="140000"/>
-              </a:lnSpc>
+              <a:spcAft>
+                <a:spcPts val="800"/>
+              </a:spcAft>
               <a:buSzPct val="100000"/>
               <a:buChar char="•"/>
             </a:pPr>
             <a:r>
-              <a:rPr lang="en-US" sz="1500" dirty="0">
+              <a:rPr lang="en-US" sz="1600" dirty="0">
                 <a:solidFill>
                   <a:srgbClr val="3D3A36"/>
                 </a:solidFill>
@@ -1974,20 +2018,20 @@
                 <a:ea typeface="Calibri" pitchFamily="34" charset="-122"/>
                 <a:cs typeface="Calibri" pitchFamily="34" charset="-120"/>
               </a:rPr>
-              <a:t>Simplify by collecting like terms.</a:t>
-            </a:r>
-            <a:endParaRPr lang="en-US" sz="1500" dirty="0"/>
+              <a:t>Terms, coefficients, constants, like terms.</a:t>
+            </a:r>
+            <a:endParaRPr lang="en-US" sz="1600" dirty="0"/>
           </a:p>
           <a:p>
             <a:pPr marL="342900" indent="-342900">
-              <a:lnSpc>
-                <a:spcPct val="140000"/>
-              </a:lnSpc>
+              <a:spcAft>
+                <a:spcPts val="800"/>
+              </a:spcAft>
               <a:buSzPct val="100000"/>
               <a:buChar char="•"/>
             </a:pPr>
             <a:r>
-              <a:rPr lang="en-US" sz="1500" dirty="0">
+              <a:rPr lang="en-US" sz="1600" dirty="0">
                 <a:solidFill>
                   <a:srgbClr val="3D3A36"/>
                 </a:solidFill>
@@ -1995,9 +2039,30 @@
                 <a:ea typeface="Calibri" pitchFamily="34" charset="-122"/>
                 <a:cs typeface="Calibri" pitchFamily="34" charset="-120"/>
               </a:rPr>
-              <a:t>Cannot add unlike terms (3x + 5 ≠ 8x).</a:t>
-            </a:r>
-            <a:endParaRPr lang="en-US" sz="1500" dirty="0"/>
+              <a:t>Simplify by combining like terms.</a:t>
+            </a:r>
+            <a:endParaRPr lang="en-US" sz="1600" dirty="0"/>
+          </a:p>
+          <a:p>
+            <a:pPr marL="342900" indent="-342900">
+              <a:spcAft>
+                <a:spcPts val="800"/>
+              </a:spcAft>
+              <a:buSzPct val="100000"/>
+              <a:buChar char="•"/>
+            </a:pPr>
+            <a:r>
+              <a:rPr lang="en-US" sz="1600" dirty="0">
+                <a:solidFill>
+                  <a:srgbClr val="3D3A36"/>
+                </a:solidFill>
+                <a:latin typeface="Calibri" pitchFamily="34" charset="0"/>
+                <a:ea typeface="Calibri" pitchFamily="34" charset="-122"/>
+                <a:cs typeface="Calibri" pitchFamily="34" charset="-120"/>
+              </a:rPr>
+              <a:t>Translate words into algebra.</a:t>
+            </a:r>
+            <a:endParaRPr lang="en-US" sz="1600" dirty="0"/>
           </a:p>
         </p:txBody>
       </p:sp>
@@ -2055,7 +2120,7 @@
         <p:spPr>
           <a:xfrm>
             <a:off x="731520" y="914400"/>
-            <a:ext cx="2743200" cy="1371600"/>
+            <a:ext cx="1828800" cy="1097280"/>
           </a:xfrm>
           <a:prstGeom prst="rect">
             <a:avLst/>
@@ -2095,7 +2160,7 @@
         </p:nvSpPr>
         <p:spPr>
           <a:xfrm>
-            <a:off x="731520" y="2286000"/>
+            <a:off x="731520" y="2011680"/>
             <a:ext cx="7680960" cy="1097280"/>
           </a:xfrm>
           <a:prstGeom prst="rect">
@@ -2112,7 +2177,7 @@
               <a:buNone/>
             </a:pPr>
             <a:r>
-              <a:rPr lang="en-US" sz="3600" b="1" dirty="0">
+              <a:rPr lang="en-US" sz="3200" b="1" dirty="0">
                 <a:solidFill>
                   <a:srgbClr val="FFFFFF"/>
                 </a:solidFill>
@@ -2120,11 +2185,31 @@
                 <a:ea typeface="Georgia" pitchFamily="34" charset="-122"/>
                 <a:cs typeface="Georgia" pitchFamily="34" charset="-120"/>
               </a:rPr>
-              <a:t>Solving Equations</a:t>
-            </a:r>
-            <a:endParaRPr lang="en-US" sz="3600" dirty="0"/>
-          </a:p>
-        </p:txBody>
+              <a:t>Equations</a:t>
+            </a:r>
+            <a:endParaRPr lang="en-US" sz="3200" dirty="0"/>
+          </a:p>
+        </p:txBody>
+      </p:sp>
+      <p:sp>
+        <p:nvSpPr>
+          <p:cNvPr id="5" name="Shape 3"/>
+          <p:cNvSpPr/>
+          <p:nvPr/>
+        </p:nvSpPr>
+        <p:spPr>
+          <a:xfrm>
+            <a:off x="731520" y="3200400"/>
+            <a:ext cx="1828800" cy="54864"/>
+          </a:xfrm>
+          <a:prstGeom prst="rect">
+            <a:avLst/>
+          </a:prstGeom>
+          <a:solidFill>
+            <a:srgbClr val="C8372D"/>
+          </a:solidFill>
+          <a:ln/>
+        </p:spPr>
       </p:sp>
     </p:spTree>
   </p:cSld>
@@ -2137,6 +2222,13 @@
 <file path=ppt/slides/slide5.xml><?xml version="1.0" encoding="utf-8"?>
 <p:sld xmlns:a="http://schemas.openxmlformats.org/drawingml/2006/main" xmlns:r="http://schemas.openxmlformats.org/officeDocument/2006/relationships" xmlns:p="http://schemas.openxmlformats.org/presentationml/2006/main">
   <p:cSld name="Slide 5">
+    <p:bg>
+      <p:bgPr>
+        <a:solidFill>
+          <a:srgbClr val="FAF8F5"/>
+        </a:solidFill>
+      </p:bgPr>
+    </p:bg>
     <p:spTree>
       <p:nvGrpSpPr>
         <p:cNvPr id="1" name=""/>
@@ -2160,13 +2252,13 @@
         <p:spPr>
           <a:xfrm>
             <a:off x="0" y="0"/>
-            <a:ext cx="9144000" cy="5143500"/>
-          </a:xfrm>
-          <a:prstGeom prst="rect">
-            <a:avLst/>
-          </a:prstGeom>
-          <a:solidFill>
-            <a:srgbClr val="FAF8F5"/>
+            <a:ext cx="9144000" cy="822960"/>
+          </a:xfrm>
+          <a:prstGeom prst="rect">
+            <a:avLst/>
+          </a:prstGeom>
+          <a:solidFill>
+            <a:srgbClr val="FFFFFF"/>
           </a:solidFill>
           <a:ln/>
         </p:spPr>
@@ -2179,8 +2271,8 @@
         </p:nvSpPr>
         <p:spPr>
           <a:xfrm>
-            <a:off x="0" y="0"/>
-            <a:ext cx="9144000" cy="54864"/>
+            <a:off x="0" y="795528"/>
+            <a:ext cx="9144000" cy="27432"/>
           </a:xfrm>
           <a:prstGeom prst="rect">
             <a:avLst/>
@@ -2199,7 +2291,7 @@
         </p:nvSpPr>
         <p:spPr>
           <a:xfrm>
-            <a:off x="640080" y="320040"/>
+            <a:off x="640080" y="91440"/>
             <a:ext cx="7863840" cy="640080"/>
           </a:xfrm>
           <a:prstGeom prst="rect">
@@ -2216,7 +2308,7 @@
               <a:buNone/>
             </a:pPr>
             <a:r>
-              <a:rPr lang="en-US" sz="2600" b="1" dirty="0">
+              <a:rPr lang="en-US" sz="2200" b="1" dirty="0">
                 <a:solidFill>
                   <a:srgbClr val="1B2A4A"/>
                 </a:solidFill>
@@ -2224,9 +2316,9 @@
                 <a:ea typeface="Georgia" pitchFamily="34" charset="-122"/>
                 <a:cs typeface="Georgia" pitchFamily="34" charset="-120"/>
               </a:rPr>
-              <a:t>Equations Quick Ref</a:t>
-            </a:r>
-            <a:endParaRPr lang="en-US" sz="2600" dirty="0"/>
+              <a:t>Equations Recap</a:t>
+            </a:r>
+            <a:endParaRPr lang="en-US" sz="2200" dirty="0"/>
           </a:p>
         </p:txBody>
       </p:sp>
@@ -2238,8 +2330,8 @@
         </p:nvSpPr>
         <p:spPr>
           <a:xfrm>
-            <a:off x="640080" y="1188720"/>
-            <a:ext cx="7863840" cy="3200400"/>
+            <a:off x="640080" y="1005840"/>
+            <a:ext cx="7863840" cy="2926080"/>
           </a:xfrm>
           <a:prstGeom prst="rect">
             <a:avLst/>
@@ -2248,18 +2340,18 @@
           <a:ln/>
         </p:spPr>
         <p:txBody>
-          <a:bodyPr wrap="square" rtlCol="0" anchor="t"/>
+          <a:bodyPr wrap="square" rtlCol="0" anchor="ctr"/>
           <a:lstStyle/>
           <a:p>
             <a:pPr marL="342900" indent="-342900">
-              <a:lnSpc>
-                <a:spcPct val="140000"/>
-              </a:lnSpc>
+              <a:spcAft>
+                <a:spcPts val="800"/>
+              </a:spcAft>
               <a:buSzPct val="100000"/>
               <a:buChar char="•"/>
             </a:pPr>
             <a:r>
-              <a:rPr lang="en-US" sz="1500" dirty="0">
+              <a:rPr lang="en-US" sz="1600" dirty="0">
                 <a:solidFill>
                   <a:srgbClr val="3D3A36"/>
                 </a:solidFill>
@@ -2267,20 +2359,20 @@
                 <a:ea typeface="Calibri" pitchFamily="34" charset="-122"/>
                 <a:cs typeface="Calibri" pitchFamily="34" charset="-120"/>
               </a:rPr>
-              <a:t>Balance method: same operation on both sides.</a:t>
-            </a:r>
-            <a:endParaRPr lang="en-US" sz="1500" dirty="0"/>
+              <a:t>Has equals sign. Two balanced sides.</a:t>
+            </a:r>
+            <a:endParaRPr lang="en-US" sz="1600" dirty="0"/>
           </a:p>
           <a:p>
             <a:pPr marL="342900" indent="-342900">
-              <a:lnSpc>
-                <a:spcPct val="140000"/>
-              </a:lnSpc>
+              <a:spcAft>
+                <a:spcPts val="800"/>
+              </a:spcAft>
               <a:buSzPct val="100000"/>
               <a:buChar char="•"/>
             </a:pPr>
             <a:r>
-              <a:rPr lang="en-US" sz="1500" dirty="0">
+              <a:rPr lang="en-US" sz="1600" dirty="0">
                 <a:solidFill>
                   <a:srgbClr val="3D3A36"/>
                 </a:solidFill>
@@ -2288,20 +2380,20 @@
                 <a:ea typeface="Calibri" pitchFamily="34" charset="-122"/>
                 <a:cs typeface="Calibri" pitchFamily="34" charset="-120"/>
               </a:rPr>
-              <a:t>One-step: undo the operation.</a:t>
-            </a:r>
-            <a:endParaRPr lang="en-US" sz="1500" dirty="0"/>
+              <a:t>Solve with inverse operations.</a:t>
+            </a:r>
+            <a:endParaRPr lang="en-US" sz="1600" dirty="0"/>
           </a:p>
           <a:p>
             <a:pPr marL="342900" indent="-342900">
-              <a:lnSpc>
-                <a:spcPct val="140000"/>
-              </a:lnSpc>
+              <a:spcAft>
+                <a:spcPts val="800"/>
+              </a:spcAft>
               <a:buSzPct val="100000"/>
               <a:buChar char="•"/>
             </a:pPr>
             <a:r>
-              <a:rPr lang="en-US" sz="1500" dirty="0">
+              <a:rPr lang="en-US" sz="1600" dirty="0">
                 <a:solidFill>
                   <a:srgbClr val="3D3A36"/>
                 </a:solidFill>
@@ -2309,20 +2401,20 @@
                 <a:ea typeface="Calibri" pitchFamily="34" charset="-122"/>
                 <a:cs typeface="Calibri" pitchFamily="34" charset="-120"/>
               </a:rPr>
-              <a:t>Two-step: deal with constant first, then coefficient.</a:t>
-            </a:r>
-            <a:endParaRPr lang="en-US" sz="1500" dirty="0"/>
+              <a:t>One-step → two-step → variables on both sides.</a:t>
+            </a:r>
+            <a:endParaRPr lang="en-US" sz="1600" dirty="0"/>
           </a:p>
           <a:p>
             <a:pPr marL="342900" indent="-342900">
-              <a:lnSpc>
-                <a:spcPct val="140000"/>
-              </a:lnSpc>
+              <a:spcAft>
+                <a:spcPts val="800"/>
+              </a:spcAft>
               <a:buSzPct val="100000"/>
               <a:buChar char="•"/>
             </a:pPr>
             <a:r>
-              <a:rPr lang="en-US" sz="1500" dirty="0">
+              <a:rPr lang="en-US" sz="1600" dirty="0">
                 <a:solidFill>
                   <a:srgbClr val="3D3A36"/>
                 </a:solidFill>
@@ -2330,9 +2422,9 @@
                 <a:ea typeface="Calibri" pitchFamily="34" charset="-122"/>
                 <a:cs typeface="Calibri" pitchFamily="34" charset="-120"/>
               </a:rPr>
-              <a:t>Always check your answer by substituting back.</a:t>
-            </a:r>
-            <a:endParaRPr lang="en-US" sz="1500" dirty="0"/>
+              <a:t>Always check by substituting back.</a:t>
+            </a:r>
+            <a:endParaRPr lang="en-US" sz="1600" dirty="0"/>
           </a:p>
         </p:txBody>
       </p:sp>
@@ -2390,7 +2482,7 @@
         <p:spPr>
           <a:xfrm>
             <a:off x="731520" y="914400"/>
-            <a:ext cx="2743200" cy="1371600"/>
+            <a:ext cx="1828800" cy="1097280"/>
           </a:xfrm>
           <a:prstGeom prst="rect">
             <a:avLst/>
@@ -2430,7 +2522,7 @@
         </p:nvSpPr>
         <p:spPr>
           <a:xfrm>
-            <a:off x="731520" y="2286000"/>
+            <a:off x="731520" y="2011680"/>
             <a:ext cx="7680960" cy="1097280"/>
           </a:xfrm>
           <a:prstGeom prst="rect">
@@ -2447,7 +2539,7 @@
               <a:buNone/>
             </a:pPr>
             <a:r>
-              <a:rPr lang="en-US" sz="3600" b="1" dirty="0">
+              <a:rPr lang="en-US" sz="3200" b="1" dirty="0">
                 <a:solidFill>
                   <a:srgbClr val="FFFFFF"/>
                 </a:solidFill>
@@ -2455,11 +2547,31 @@
                 <a:ea typeface="Georgia" pitchFamily="34" charset="-122"/>
                 <a:cs typeface="Georgia" pitchFamily="34" charset="-120"/>
               </a:rPr>
-              <a:t>Patterns &amp; Substitution</a:t>
-            </a:r>
-            <a:endParaRPr lang="en-US" sz="3600" dirty="0"/>
-          </a:p>
-        </p:txBody>
+              <a:t>Functions &amp; Substitution</a:t>
+            </a:r>
+            <a:endParaRPr lang="en-US" sz="3200" dirty="0"/>
+          </a:p>
+        </p:txBody>
+      </p:sp>
+      <p:sp>
+        <p:nvSpPr>
+          <p:cNvPr id="5" name="Shape 3"/>
+          <p:cNvSpPr/>
+          <p:nvPr/>
+        </p:nvSpPr>
+        <p:spPr>
+          <a:xfrm>
+            <a:off x="731520" y="3200400"/>
+            <a:ext cx="1828800" cy="54864"/>
+          </a:xfrm>
+          <a:prstGeom prst="rect">
+            <a:avLst/>
+          </a:prstGeom>
+          <a:solidFill>
+            <a:srgbClr val="C8372D"/>
+          </a:solidFill>
+          <a:ln/>
+        </p:spPr>
       </p:sp>
     </p:spTree>
   </p:cSld>
@@ -2472,6 +2584,13 @@
 <file path=ppt/slides/slide7.xml><?xml version="1.0" encoding="utf-8"?>
 <p:sld xmlns:a="http://schemas.openxmlformats.org/drawingml/2006/main" xmlns:r="http://schemas.openxmlformats.org/officeDocument/2006/relationships" xmlns:p="http://schemas.openxmlformats.org/presentationml/2006/main">
   <p:cSld name="Slide 7">
+    <p:bg>
+      <p:bgPr>
+        <a:solidFill>
+          <a:srgbClr val="FAF8F5"/>
+        </a:solidFill>
+      </p:bgPr>
+    </p:bg>
     <p:spTree>
       <p:nvGrpSpPr>
         <p:cNvPr id="1" name=""/>
@@ -2495,13 +2614,13 @@
         <p:spPr>
           <a:xfrm>
             <a:off x="0" y="0"/>
-            <a:ext cx="9144000" cy="5143500"/>
-          </a:xfrm>
-          <a:prstGeom prst="rect">
-            <a:avLst/>
-          </a:prstGeom>
-          <a:solidFill>
-            <a:srgbClr val="FAF8F5"/>
+            <a:ext cx="9144000" cy="822960"/>
+          </a:xfrm>
+          <a:prstGeom prst="rect">
+            <a:avLst/>
+          </a:prstGeom>
+          <a:solidFill>
+            <a:srgbClr val="FFFFFF"/>
           </a:solidFill>
           <a:ln/>
         </p:spPr>
@@ -2514,8 +2633,8 @@
         </p:nvSpPr>
         <p:spPr>
           <a:xfrm>
-            <a:off x="0" y="0"/>
-            <a:ext cx="9144000" cy="54864"/>
+            <a:off x="0" y="795528"/>
+            <a:ext cx="9144000" cy="27432"/>
           </a:xfrm>
           <a:prstGeom prst="rect">
             <a:avLst/>
@@ -2534,7 +2653,7 @@
         </p:nvSpPr>
         <p:spPr>
           <a:xfrm>
-            <a:off x="640080" y="320040"/>
+            <a:off x="640080" y="91440"/>
             <a:ext cx="7863840" cy="640080"/>
           </a:xfrm>
           <a:prstGeom prst="rect">
@@ -2551,7 +2670,7 @@
               <a:buNone/>
             </a:pPr>
             <a:r>
-              <a:rPr lang="en-US" sz="2600" b="1" dirty="0">
+              <a:rPr lang="en-US" sz="2200" b="1" dirty="0">
                 <a:solidFill>
                   <a:srgbClr val="1B2A4A"/>
                 </a:solidFill>
@@ -2559,9 +2678,9 @@
                 <a:ea typeface="Georgia" pitchFamily="34" charset="-122"/>
                 <a:cs typeface="Georgia" pitchFamily="34" charset="-120"/>
               </a:rPr>
-              <a:t>Patterns &amp; Substitution</a:t>
-            </a:r>
-            <a:endParaRPr lang="en-US" sz="2600" dirty="0"/>
+              <a:t>Functions &amp; Substitution Recap</a:t>
+            </a:r>
+            <a:endParaRPr lang="en-US" sz="2200" dirty="0"/>
           </a:p>
         </p:txBody>
       </p:sp>
@@ -2573,8 +2692,8 @@
         </p:nvSpPr>
         <p:spPr>
           <a:xfrm>
-            <a:off x="640080" y="1188720"/>
-            <a:ext cx="7863840" cy="3200400"/>
+            <a:off x="640080" y="1005840"/>
+            <a:ext cx="7863840" cy="2926080"/>
           </a:xfrm>
           <a:prstGeom prst="rect">
             <a:avLst/>
@@ -2583,18 +2702,18 @@
           <a:ln/>
         </p:spPr>
         <p:txBody>
-          <a:bodyPr wrap="square" rtlCol="0" anchor="t"/>
+          <a:bodyPr wrap="square" rtlCol="0" anchor="ctr"/>
           <a:lstStyle/>
           <a:p>
             <a:pPr marL="342900" indent="-342900">
-              <a:lnSpc>
-                <a:spcPct val="140000"/>
-              </a:lnSpc>
+              <a:spcAft>
+                <a:spcPts val="800"/>
+              </a:spcAft>
               <a:buSzPct val="100000"/>
               <a:buChar char="•"/>
             </a:pPr>
             <a:r>
-              <a:rPr lang="en-US" sz="1500" dirty="0">
+              <a:rPr lang="en-US" sz="1600" dirty="0">
                 <a:solidFill>
                   <a:srgbClr val="3D3A36"/>
                 </a:solidFill>
@@ -2602,20 +2721,20 @@
                 <a:ea typeface="Calibri" pitchFamily="34" charset="-122"/>
                 <a:cs typeface="Calibri" pitchFamily="34" charset="-120"/>
               </a:rPr>
-              <a:t>Common difference → coefficient of n.</a:t>
-            </a:r>
-            <a:endParaRPr lang="en-US" sz="1500" dirty="0"/>
+              <a:t>Input → Rule → Output. nth term = an + b.</a:t>
+            </a:r>
+            <a:endParaRPr lang="en-US" sz="1600" dirty="0"/>
           </a:p>
           <a:p>
             <a:pPr marL="342900" indent="-342900">
-              <a:lnSpc>
-                <a:spcPct val="140000"/>
-              </a:lnSpc>
+              <a:spcAft>
+                <a:spcPts val="800"/>
+              </a:spcAft>
               <a:buSzPct val="100000"/>
               <a:buChar char="•"/>
             </a:pPr>
             <a:r>
-              <a:rPr lang="en-US" sz="1500" dirty="0">
+              <a:rPr lang="en-US" sz="1600" dirty="0">
                 <a:solidFill>
                   <a:srgbClr val="3D3A36"/>
                 </a:solidFill>
@@ -2623,20 +2742,20 @@
                 <a:ea typeface="Calibri" pitchFamily="34" charset="-122"/>
                 <a:cs typeface="Calibri" pitchFamily="34" charset="-120"/>
               </a:rPr>
-              <a:t>Rule format: an + b.</a:t>
-            </a:r>
-            <a:endParaRPr lang="en-US" sz="1500" dirty="0"/>
+              <a:t>Substitution: replace variables, use brackets, BIDMAS.</a:t>
+            </a:r>
+            <a:endParaRPr lang="en-US" sz="1600" dirty="0"/>
           </a:p>
           <a:p>
             <a:pPr marL="342900" indent="-342900">
-              <a:lnSpc>
-                <a:spcPct val="140000"/>
-              </a:lnSpc>
+              <a:spcAft>
+                <a:spcPts val="800"/>
+              </a:spcAft>
               <a:buSzPct val="100000"/>
               <a:buChar char="•"/>
             </a:pPr>
             <a:r>
-              <a:rPr lang="en-US" sz="1500" dirty="0">
+              <a:rPr lang="en-US" sz="1600" dirty="0">
                 <a:solidFill>
                   <a:srgbClr val="3D3A36"/>
                 </a:solidFill>
@@ -2644,20 +2763,20 @@
                 <a:ea typeface="Calibri" pitchFamily="34" charset="-122"/>
                 <a:cs typeface="Calibri" pitchFamily="34" charset="-120"/>
               </a:rPr>
-              <a:t>Substitution: replace variable with number.</a:t>
-            </a:r>
-            <a:endParaRPr lang="en-US" sz="1500" dirty="0"/>
+              <a:t>Watch negatives and powers: x² = x×x, not x×2.</a:t>
+            </a:r>
+            <a:endParaRPr lang="en-US" sz="1600" dirty="0"/>
           </a:p>
           <a:p>
             <a:pPr marL="342900" indent="-342900">
-              <a:lnSpc>
-                <a:spcPct val="140000"/>
-              </a:lnSpc>
+              <a:spcAft>
+                <a:spcPts val="800"/>
+              </a:spcAft>
               <a:buSzPct val="100000"/>
               <a:buChar char="•"/>
             </a:pPr>
             <a:r>
-              <a:rPr lang="en-US" sz="1500" dirty="0">
+              <a:rPr lang="en-US" sz="1600" dirty="0">
                 <a:solidFill>
                   <a:srgbClr val="3D3A36"/>
                 </a:solidFill>
@@ -2665,9 +2784,9 @@
                 <a:ea typeface="Calibri" pitchFamily="34" charset="-122"/>
                 <a:cs typeface="Calibri" pitchFamily="34" charset="-120"/>
               </a:rPr>
-              <a:t>Follow BIDMAS/BODMAS order of operations.</a:t>
-            </a:r>
-            <a:endParaRPr lang="en-US" sz="1500" dirty="0"/>
+              <a:t>Formula → Substitution → Answer.</a:t>
+            </a:r>
+            <a:endParaRPr lang="en-US" sz="1600" dirty="0"/>
           </a:p>
         </p:txBody>
       </p:sp>
@@ -2783,7 +2902,7 @@
         </p:nvSpPr>
         <p:spPr>
           <a:xfrm>
-            <a:off x="731520" y="2468880"/>
+            <a:off x="731520" y="2560320"/>
             <a:ext cx="7680960" cy="548640"/>
           </a:xfrm>
           <a:prstGeom prst="rect">
@@ -2800,7 +2919,7 @@
               <a:buNone/>
             </a:pPr>
             <a:r>
-              <a:rPr lang="en-US" sz="1800" dirty="0">
+              <a:rPr lang="en-US" sz="2000" dirty="0">
                 <a:solidFill>
                   <a:srgbClr val="C8372D"/>
                 </a:solidFill>
@@ -2808,48 +2927,9 @@
                 <a:ea typeface="Calibri" pitchFamily="34" charset="-122"/>
                 <a:cs typeface="Calibri" pitchFamily="34" charset="-120"/>
               </a:rPr>
-              <a:t>learnlattice.org/students/exam-revision</a:t>
-            </a:r>
-            <a:endParaRPr lang="en-US" sz="1800" dirty="0"/>
-          </a:p>
-        </p:txBody>
-      </p:sp>
-      <p:sp>
-        <p:nvSpPr>
-          <p:cNvPr id="6" name="Text 4"/>
-          <p:cNvSpPr/>
-          <p:nvPr/>
-        </p:nvSpPr>
-        <p:spPr>
-          <a:xfrm>
-            <a:off x="731520" y="3200400"/>
-            <a:ext cx="7680960" cy="457200"/>
-          </a:xfrm>
-          <a:prstGeom prst="rect">
-            <a:avLst/>
-          </a:prstGeom>
-          <a:noFill/>
-          <a:ln/>
-        </p:spPr>
-        <p:txBody>
-          <a:bodyPr wrap="square" rtlCol="0" anchor="ctr"/>
-          <a:lstStyle/>
-          <a:p>
-            <a:pPr algn="ctr" indent="0" marL="0">
-              <a:buNone/>
-            </a:pPr>
-            <a:r>
-              <a:rPr lang="en-US" sz="1400" dirty="0">
-                <a:solidFill>
-                  <a:srgbClr val="9B9690"/>
-                </a:solidFill>
-                <a:latin typeface="Calibri" pitchFamily="34" charset="0"/>
-                <a:ea typeface="Calibri" pitchFamily="34" charset="-122"/>
-                <a:cs typeface="Calibri" pitchFamily="34" charset="-120"/>
-              </a:rPr>
               <a:t>mrzocchi.com</a:t>
             </a:r>
-            <a:endParaRPr lang="en-US" sz="1400" dirty="0"/>
+            <a:endParaRPr lang="en-US" sz="2000" dirty="0"/>
           </a:p>
         </p:txBody>
       </p:sp>
